--- a/images/respic/theme_qc.pptx
+++ b/images/respic/theme_qc.pptx
@@ -200,7 +200,7 @@
           <a:p>
             <a:fld id="{6BA546CD-0611-7545-8F55-072F0299D807}" type="datetimeFigureOut">
               <a:rPr lang="en-US" smtClean="0"/>
-              <a:t>4/9/25</a:t>
+              <a:t>5/13/26</a:t>
             </a:fld>
             <a:endParaRPr lang="en-US"/>
           </a:p>
@@ -729,7 +729,7 @@
           <a:p>
             <a:fld id="{9DCA369C-CB3F-4260-86E8-FD3F54C73225}" type="datetimeFigureOut">
               <a:rPr lang="en-US" smtClean="0"/>
-              <a:t>4/9/25</a:t>
+              <a:t>5/13/26</a:t>
             </a:fld>
             <a:endParaRPr lang="en-US"/>
           </a:p>
@@ -1059,7 +1059,7 @@
           <a:p>
             <a:fld id="{9DCA369C-CB3F-4260-86E8-FD3F54C73225}" type="datetimeFigureOut">
               <a:rPr lang="en-US" smtClean="0"/>
-              <a:t>4/9/25</a:t>
+              <a:t>5/13/26</a:t>
             </a:fld>
             <a:endParaRPr lang="en-US"/>
           </a:p>
@@ -1267,7 +1267,7 @@
           <a:p>
             <a:fld id="{9DCA369C-CB3F-4260-86E8-FD3F54C73225}" type="datetimeFigureOut">
               <a:rPr lang="en-US" smtClean="0"/>
-              <a:t>4/9/25</a:t>
+              <a:t>5/13/26</a:t>
             </a:fld>
             <a:endParaRPr lang="en-US"/>
           </a:p>
@@ -1572,7 +1572,7 @@
           <a:p>
             <a:fld id="{9DCA369C-CB3F-4260-86E8-FD3F54C73225}" type="datetimeFigureOut">
               <a:rPr lang="en-US" smtClean="0"/>
-              <a:t>4/9/25</a:t>
+              <a:t>5/13/26</a:t>
             </a:fld>
             <a:endParaRPr lang="en-US"/>
           </a:p>
@@ -1837,7 +1837,7 @@
           <a:p>
             <a:fld id="{9DCA369C-CB3F-4260-86E8-FD3F54C73225}" type="datetimeFigureOut">
               <a:rPr lang="en-US" smtClean="0"/>
-              <a:t>4/9/25</a:t>
+              <a:t>5/13/26</a:t>
             </a:fld>
             <a:endParaRPr lang="en-US"/>
           </a:p>
@@ -2249,7 +2249,7 @@
           <a:p>
             <a:fld id="{9DCA369C-CB3F-4260-86E8-FD3F54C73225}" type="datetimeFigureOut">
               <a:rPr lang="en-US" smtClean="0"/>
-              <a:t>4/9/25</a:t>
+              <a:t>5/13/26</a:t>
             </a:fld>
             <a:endParaRPr lang="en-US"/>
           </a:p>
@@ -2390,7 +2390,7 @@
           <a:p>
             <a:fld id="{9DCA369C-CB3F-4260-86E8-FD3F54C73225}" type="datetimeFigureOut">
               <a:rPr lang="en-US" smtClean="0"/>
-              <a:t>4/9/25</a:t>
+              <a:t>5/13/26</a:t>
             </a:fld>
             <a:endParaRPr lang="en-US"/>
           </a:p>
@@ -2503,7 +2503,7 @@
           <a:p>
             <a:fld id="{9DCA369C-CB3F-4260-86E8-FD3F54C73225}" type="datetimeFigureOut">
               <a:rPr lang="en-US" smtClean="0"/>
-              <a:t>4/9/25</a:t>
+              <a:t>5/13/26</a:t>
             </a:fld>
             <a:endParaRPr lang="en-US"/>
           </a:p>
@@ -2814,7 +2814,7 @@
           <a:p>
             <a:fld id="{9DCA369C-CB3F-4260-86E8-FD3F54C73225}" type="datetimeFigureOut">
               <a:rPr lang="en-US" smtClean="0"/>
-              <a:t>4/9/25</a:t>
+              <a:t>5/13/26</a:t>
             </a:fld>
             <a:endParaRPr lang="en-US"/>
           </a:p>
@@ -3102,7 +3102,7 @@
           <a:p>
             <a:fld id="{9DCA369C-CB3F-4260-86E8-FD3F54C73225}" type="datetimeFigureOut">
               <a:rPr lang="en-US" smtClean="0"/>
-              <a:t>4/9/25</a:t>
+              <a:t>5/13/26</a:t>
             </a:fld>
             <a:endParaRPr lang="en-US"/>
           </a:p>
@@ -3343,7 +3343,7 @@
           <a:p>
             <a:fld id="{9DCA369C-CB3F-4260-86E8-FD3F54C73225}" type="datetimeFigureOut">
               <a:rPr lang="en-US" smtClean="0"/>
-              <a:t>4/9/25</a:t>
+              <a:t>5/13/26</a:t>
             </a:fld>
             <a:endParaRPr lang="en-US"/>
           </a:p>
